--- a/NanoRestore_KLA_PS01.pptx
+++ b/NanoRestore_KLA_PS01.pptx
@@ -6182,27 +6182,27 @@
             </a:r>
             <a:br/>
             <a:r>
-              <a:t>✓ README.md (Comprehensive setup &amp; 1-line execution)</a:t>
+              <a:t>✓ run.py (Official Entrypoint: python run.py &lt;input-dir&gt; &lt;output-dir&gt;)</a:t>
             </a:r>
             <a:br/>
             <a:r>
-              <a:t>✓ evaluate.py (Standalone CLI benchmark accepting .npy &amp; images)</a:t>
+              <a:t>✓ README.md (Comprehensive setup &amp; 1-line reproduction guide)</a:t>
             </a:r>
             <a:br/>
             <a:r>
-              <a:t>✓ train.py (Reproducible supervised training script)</a:t>
+              <a:t>✓ models/best_model_weights.pt (Trained PyTorch model in models/)</a:t>
             </a:r>
             <a:br/>
             <a:r>
-              <a:t>✓ weights/best_model_weights.pt (Final trained PyTorch model)</a:t>
+              <a:t>✓ requirements.txt (Pinned dependencies with versions)</a:t>
             </a:r>
             <a:br/>
             <a:r>
-              <a:t>✓ outputs/ (1,000+ restored full-res PNGs &amp; raw .npy arrays)</a:t>
+              <a:t>✓ outputs/ (1,000+ restored full-res .npy arrays &amp; PNGs)</a:t>
             </a:r>
             <a:br/>
             <a:r>
-              <a:t>✓ requirements.txt (Pinned dependencies)</a:t>
+              <a:t>✓ convert_npy_to_png.py (Standalone .NPY visualizer for evaluators)</a:t>
             </a:r>
           </a:p>
         </p:txBody>
